--- a/report and ppt/IOHE_External_PPT_Updated.pptx
+++ b/report and ppt/IOHE_External_PPT_Updated.pptx
@@ -233,7 +233,7 @@
             <a:fld id="{25D2B5EB-424D-4C39-A8AB-65F1D7895EF3}" type="datetimeFigureOut">
               <a:rPr lang="en-US" smtClean="0"/>
               <a:pPr/>
-              <a:t>4/29/2026</a:t>
+              <a:t>5/14/2026</a:t>
             </a:fld>
             <a:endParaRPr lang="en-US"/>
           </a:p>
@@ -416,7 +416,7 @@
             <a:fld id="{888BC1CF-45D5-4DEE-AAB8-8C5341844FC9}" type="datetimeFigureOut">
               <a:rPr lang="en-US" smtClean="0"/>
               <a:pPr/>
-              <a:t>4/29/2026</a:t>
+              <a:t>5/14/2026</a:t>
             </a:fld>
             <a:endParaRPr lang="en-US"/>
           </a:p>
@@ -5977,7 +5977,7 @@
         <p:spPr>
           <a:xfrm>
             <a:off x="203200" y="1241778"/>
-            <a:ext cx="8703733" cy="5016758"/>
+            <a:ext cx="8703733" cy="4739759"/>
           </a:xfrm>
           <a:prstGeom prst="rect">
             <a:avLst/>
@@ -6023,7 +6023,7 @@
                 <a:latin typeface="Times New Roman" panose="02020603050405020304" pitchFamily="18" charset="0"/>
                 <a:cs typeface="Times New Roman" panose="02020603050405020304" pitchFamily="18" charset="0"/>
               </a:rPr>
-              <a:t>Systems like RAPTOR and DPR rely on vector databases and GPU infrastructure for retrieval.</a:t>
+              <a:t>Systems like RAPTOR and DPR rely on vector databases for retrieval.</a:t>
             </a:r>
           </a:p>
           <a:p>
@@ -6109,14 +6109,14 @@
                 <a:latin typeface="Times New Roman" panose="02020603050405020304" pitchFamily="18" charset="0"/>
                 <a:cs typeface="Times New Roman" panose="02020603050405020304" pitchFamily="18" charset="0"/>
               </a:rPr>
-              <a:t>Metrics like Recall@K</a:t>
+              <a:t>Metrics </a:t>
             </a:r>
             <a:r>
               <a:rPr lang="en-US" dirty="0">
                 <a:latin typeface="Times New Roman" panose="02020603050405020304" pitchFamily="18" charset="0"/>
                 <a:cs typeface="Times New Roman" panose="02020603050405020304" pitchFamily="18" charset="0"/>
               </a:rPr>
-              <a:t>, MRR, NDCG only check if relevant content was present.</a:t>
+              <a:t>only check if relevant content was present.</a:t>
             </a:r>
           </a:p>
           <a:p>
@@ -6975,7 +6975,7 @@
                 <a:latin typeface="Times New Roman" panose="02020603050405020304" pitchFamily="18" charset="0"/>
                 <a:cs typeface="Times New Roman" panose="02020603050405020304" pitchFamily="18" charset="0"/>
               </a:rPr>
-              <a:t>100 papers, up to 3 QA pairs per paper = 209 total question-answer pairs</a:t>
+              <a:t>209 total question-answer pairs</a:t>
             </a:r>
           </a:p>
           <a:p>
@@ -8512,7 +8512,7 @@
         <p:spPr>
           <a:xfrm>
             <a:off x="147637" y="1028343"/>
-            <a:ext cx="8848725" cy="4370427"/>
+            <a:ext cx="8848725" cy="3539430"/>
           </a:xfrm>
           <a:prstGeom prst="rect">
             <a:avLst/>
@@ -8578,37 +8578,6 @@
                 <a:cs typeface="Times New Roman" panose="02020603050405020304" pitchFamily="18" charset="0"/>
               </a:rPr>
               <a:t>Extend leave-one-out sensitivity to approximate Shapley values</a:t>
-            </a:r>
-          </a:p>
-          <a:p>
-            <a:endParaRPr lang="en-IN" dirty="0">
-              <a:latin typeface="Times New Roman" panose="02020603050405020304" pitchFamily="18" charset="0"/>
-              <a:cs typeface="Times New Roman" panose="02020603050405020304" pitchFamily="18" charset="0"/>
-            </a:endParaRPr>
-          </a:p>
-          <a:p>
-            <a:pPr>
-              <a:buNone/>
-            </a:pPr>
-            <a:r>
-              <a:rPr lang="en-IN" sz="2000" i="1" dirty="0">
-                <a:latin typeface="Times New Roman" panose="02020603050405020304" pitchFamily="18" charset="0"/>
-                <a:cs typeface="Times New Roman" panose="02020603050405020304" pitchFamily="18" charset="0"/>
-              </a:rPr>
-              <a:t>Test on More Benchmarks</a:t>
-            </a:r>
-          </a:p>
-          <a:p>
-            <a:pPr>
-              <a:buFont typeface="Arial" panose="020B0604020202020204" pitchFamily="34" charset="0"/>
-              <a:buChar char="•"/>
-            </a:pPr>
-            <a:r>
-              <a:rPr lang="en-IN" dirty="0">
-                <a:latin typeface="Times New Roman" panose="02020603050405020304" pitchFamily="18" charset="0"/>
-                <a:cs typeface="Times New Roman" panose="02020603050405020304" pitchFamily="18" charset="0"/>
-              </a:rPr>
-              <a:t>Port HierRAG to NarrativeQA and QuALITY datasets</a:t>
             </a:r>
           </a:p>
           <a:p>
@@ -9473,18 +9442,18 @@
 </file>
 
 <file path=customXml/item1.xml><?xml version="1.0" encoding="utf-8"?>
-<p:properties xmlns:p="http://schemas.microsoft.com/office/2006/metadata/properties" xmlns:xsi="http://www.w3.org/2001/XMLSchema-instance" xmlns:pc="http://schemas.microsoft.com/office/infopath/2007/PartnerControls">
-  <documentManagement/>
-</p:properties>
-</file>
-
-<file path=customXml/item2.xml><?xml version="1.0" encoding="utf-8"?>
 <?mso-contentType ?>
 <FormTemplates xmlns="http://schemas.microsoft.com/sharepoint/v3/contenttype/forms">
   <Display>DocumentLibraryForm</Display>
   <Edit>DocumentLibraryForm</Edit>
   <New>DocumentLibraryForm</New>
 </FormTemplates>
+</file>
+
+<file path=customXml/item2.xml><?xml version="1.0" encoding="utf-8"?>
+<p:properties xmlns:p="http://schemas.microsoft.com/office/2006/metadata/properties" xmlns:xsi="http://www.w3.org/2001/XMLSchema-instance" xmlns:pc="http://schemas.microsoft.com/office/infopath/2007/PartnerControls">
+  <documentManagement/>
+</p:properties>
 </file>
 
 <file path=customXml/item3.xml><?xml version="1.0" encoding="utf-8"?>
@@ -9602,6 +9571,14 @@
 </file>
 
 <file path=customXml/itemProps1.xml><?xml version="1.0" encoding="utf-8"?>
+<ds:datastoreItem xmlns:ds="http://schemas.openxmlformats.org/officeDocument/2006/customXml" ds:itemID="{737ED6F0-5E4C-4CD0-9B68-9C53F925A6F7}">
+  <ds:schemaRefs>
+    <ds:schemaRef ds:uri="http://schemas.microsoft.com/sharepoint/v3/contenttype/forms"/>
+  </ds:schemaRefs>
+</ds:datastoreItem>
+</file>
+
+<file path=customXml/itemProps2.xml><?xml version="1.0" encoding="utf-8"?>
 <ds:datastoreItem xmlns:ds="http://schemas.openxmlformats.org/officeDocument/2006/customXml" ds:itemID="{4A62A602-78C1-468C-BB25-57CD481DB741}">
   <ds:schemaRefs>
     <ds:schemaRef ds:uri="http://purl.org/dc/terms/"/>
@@ -9612,14 +9589,6 @@
     <ds:schemaRef ds:uri="http://purl.org/dc/elements/1.1/"/>
     <ds:schemaRef ds:uri="http://schemas.microsoft.com/office/infopath/2007/PartnerControls"/>
     <ds:schemaRef ds:uri="http://schemas.openxmlformats.org/package/2006/metadata/core-properties"/>
-  </ds:schemaRefs>
-</ds:datastoreItem>
-</file>
-
-<file path=customXml/itemProps2.xml><?xml version="1.0" encoding="utf-8"?>
-<ds:datastoreItem xmlns:ds="http://schemas.openxmlformats.org/officeDocument/2006/customXml" ds:itemID="{737ED6F0-5E4C-4CD0-9B68-9C53F925A6F7}">
-  <ds:schemaRefs>
-    <ds:schemaRef ds:uri="http://schemas.microsoft.com/sharepoint/v3/contenttype/forms"/>
   </ds:schemaRefs>
 </ds:datastoreItem>
 </file>

--- a/report and ppt/IOHE_External_PPT_Updated.pptx
+++ b/report and ppt/IOHE_External_PPT_Updated.pptx
@@ -8512,7 +8512,7 @@
         <p:spPr>
           <a:xfrm>
             <a:off x="147637" y="1028343"/>
-            <a:ext cx="8848725" cy="3539430"/>
+            <a:ext cx="8848725" cy="2677656"/>
           </a:xfrm>
           <a:prstGeom prst="rect">
             <a:avLst/>
@@ -8547,37 +8547,6 @@
                 <a:cs typeface="Times New Roman" panose="02020603050405020304" pitchFamily="18" charset="0"/>
               </a:rPr>
               <a:t>Replace token F1 with BERTScore or other semantic similarity metrics</a:t>
-            </a:r>
-          </a:p>
-          <a:p>
-            <a:endParaRPr lang="en-IN" dirty="0">
-              <a:latin typeface="Times New Roman" panose="02020603050405020304" pitchFamily="18" charset="0"/>
-              <a:cs typeface="Times New Roman" panose="02020603050405020304" pitchFamily="18" charset="0"/>
-            </a:endParaRPr>
-          </a:p>
-          <a:p>
-            <a:pPr>
-              <a:buNone/>
-            </a:pPr>
-            <a:r>
-              <a:rPr lang="en-IN" sz="2000" i="1" dirty="0">
-                <a:latin typeface="Times New Roman" panose="02020603050405020304" pitchFamily="18" charset="0"/>
-                <a:cs typeface="Times New Roman" panose="02020603050405020304" pitchFamily="18" charset="0"/>
-              </a:rPr>
-              <a:t>Shapley Value Attribution</a:t>
-            </a:r>
-          </a:p>
-          <a:p>
-            <a:pPr>
-              <a:buFont typeface="Arial" panose="020B0604020202020204" pitchFamily="34" charset="0"/>
-              <a:buChar char="•"/>
-            </a:pPr>
-            <a:r>
-              <a:rPr lang="en-IN" dirty="0">
-                <a:latin typeface="Times New Roman" panose="02020603050405020304" pitchFamily="18" charset="0"/>
-                <a:cs typeface="Times New Roman" panose="02020603050405020304" pitchFamily="18" charset="0"/>
-              </a:rPr>
-              <a:t>Extend leave-one-out sensitivity to approximate Shapley values</a:t>
             </a:r>
           </a:p>
           <a:p>
@@ -9442,21 +9411,6 @@
 </file>
 
 <file path=customXml/item1.xml><?xml version="1.0" encoding="utf-8"?>
-<?mso-contentType ?>
-<FormTemplates xmlns="http://schemas.microsoft.com/sharepoint/v3/contenttype/forms">
-  <Display>DocumentLibraryForm</Display>
-  <Edit>DocumentLibraryForm</Edit>
-  <New>DocumentLibraryForm</New>
-</FormTemplates>
-</file>
-
-<file path=customXml/item2.xml><?xml version="1.0" encoding="utf-8"?>
-<p:properties xmlns:p="http://schemas.microsoft.com/office/2006/metadata/properties" xmlns:xsi="http://www.w3.org/2001/XMLSchema-instance" xmlns:pc="http://schemas.microsoft.com/office/infopath/2007/PartnerControls">
-  <documentManagement/>
-</p:properties>
-</file>
-
-<file path=customXml/item3.xml><?xml version="1.0" encoding="utf-8"?>
 <ct:contentTypeSchema xmlns:ct="http://schemas.microsoft.com/office/2006/metadata/contentType" xmlns:ma="http://schemas.microsoft.com/office/2006/metadata/properties/metaAttributes" ct:_="" ma:_="" ma:contentTypeName="Document" ma:contentTypeID="0x010100096F1BF43DDE004485E7A868D137D60A" ma:contentTypeVersion="0" ma:contentTypeDescription="Create a new document." ma:contentTypeScope="" ma:versionID="47fff7f98a9c49c088ba096c14cf4458">
   <xsd:schema xmlns:xsd="http://www.w3.org/2001/XMLSchema" xmlns:xs="http://www.w3.org/2001/XMLSchema" xmlns:p="http://schemas.microsoft.com/office/2006/metadata/properties" targetNamespace="http://schemas.microsoft.com/office/2006/metadata/properties" ma:root="true" ma:fieldsID="c05e9f2c4932a6a674126b9dde7716ea">
     <xsd:element name="properties">
@@ -9570,10 +9524,33 @@
 </ct:contentTypeSchema>
 </file>
 
+<file path=customXml/item2.xml><?xml version="1.0" encoding="utf-8"?>
+<p:properties xmlns:p="http://schemas.microsoft.com/office/2006/metadata/properties" xmlns:xsi="http://www.w3.org/2001/XMLSchema-instance" xmlns:pc="http://schemas.microsoft.com/office/infopath/2007/PartnerControls">
+  <documentManagement/>
+</p:properties>
+</file>
+
+<file path=customXml/item3.xml><?xml version="1.0" encoding="utf-8"?>
+<?mso-contentType ?>
+<FormTemplates xmlns="http://schemas.microsoft.com/sharepoint/v3/contenttype/forms">
+  <Display>DocumentLibraryForm</Display>
+  <Edit>DocumentLibraryForm</Edit>
+  <New>DocumentLibraryForm</New>
+</FormTemplates>
+</file>
+
 <file path=customXml/itemProps1.xml><?xml version="1.0" encoding="utf-8"?>
-<ds:datastoreItem xmlns:ds="http://schemas.openxmlformats.org/officeDocument/2006/customXml" ds:itemID="{737ED6F0-5E4C-4CD0-9B68-9C53F925A6F7}">
+<ds:datastoreItem xmlns:ds="http://schemas.openxmlformats.org/officeDocument/2006/customXml" ds:itemID="{491DF113-39A2-46D5-BFDA-E63300A9ECAB}">
   <ds:schemaRefs>
-    <ds:schemaRef ds:uri="http://schemas.microsoft.com/sharepoint/v3/contenttype/forms"/>
+    <ds:schemaRef ds:uri="http://schemas.microsoft.com/office/2006/metadata/contentType"/>
+    <ds:schemaRef ds:uri="http://schemas.microsoft.com/office/2006/metadata/properties/metaAttributes"/>
+    <ds:schemaRef ds:uri="http://www.w3.org/2001/XMLSchema"/>
+    <ds:schemaRef ds:uri="http://schemas.microsoft.com/office/2006/metadata/properties"/>
+    <ds:schemaRef ds:uri="http://schemas.openxmlformats.org/package/2006/metadata/core-properties"/>
+    <ds:schemaRef ds:uri="http://purl.org/dc/elements/1.1/"/>
+    <ds:schemaRef ds:uri="http://purl.org/dc/terms/"/>
+    <ds:schemaRef ds:uri="http://schemas.microsoft.com/internal/obd"/>
+    <ds:schemaRef ds:uri="http://schemas.microsoft.com/office/infopath/2007/PartnerControls"/>
   </ds:schemaRefs>
 </ds:datastoreItem>
 </file>
@@ -9594,17 +9571,9 @@
 </file>
 
 <file path=customXml/itemProps3.xml><?xml version="1.0" encoding="utf-8"?>
-<ds:datastoreItem xmlns:ds="http://schemas.openxmlformats.org/officeDocument/2006/customXml" ds:itemID="{491DF113-39A2-46D5-BFDA-E63300A9ECAB}">
+<ds:datastoreItem xmlns:ds="http://schemas.openxmlformats.org/officeDocument/2006/customXml" ds:itemID="{737ED6F0-5E4C-4CD0-9B68-9C53F925A6F7}">
   <ds:schemaRefs>
-    <ds:schemaRef ds:uri="http://schemas.microsoft.com/office/2006/metadata/contentType"/>
-    <ds:schemaRef ds:uri="http://schemas.microsoft.com/office/2006/metadata/properties/metaAttributes"/>
-    <ds:schemaRef ds:uri="http://www.w3.org/2001/XMLSchema"/>
-    <ds:schemaRef ds:uri="http://schemas.microsoft.com/office/2006/metadata/properties"/>
-    <ds:schemaRef ds:uri="http://schemas.openxmlformats.org/package/2006/metadata/core-properties"/>
-    <ds:schemaRef ds:uri="http://purl.org/dc/elements/1.1/"/>
-    <ds:schemaRef ds:uri="http://purl.org/dc/terms/"/>
-    <ds:schemaRef ds:uri="http://schemas.microsoft.com/internal/obd"/>
-    <ds:schemaRef ds:uri="http://schemas.microsoft.com/office/infopath/2007/PartnerControls"/>
+    <ds:schemaRef ds:uri="http://schemas.microsoft.com/sharepoint/v3/contenttype/forms"/>
   </ds:schemaRefs>
 </ds:datastoreItem>
 </file>